--- a/docs/AXI2APB_UVM_Verification_Presentation_V2.pptx
+++ b/docs/AXI2APB_UVM_Verification_Presentation_V2.pptx
@@ -8970,7 +8970,7 @@
         <p:spPr>
           <a:xfrm>
             <a:off x="960120" y="2103120"/>
-            <a:ext cx="4663440" cy="4114800"/>
+            <a:ext cx="4663440" cy="1862048"/>
           </a:xfrm>
           <a:prstGeom prst="rect">
             <a:avLst/>
@@ -8989,22 +8989,40 @@
               </a:spcAft>
             </a:pPr>
             <a:r>
-              <a:rPr sz="1500" b="1">
+              <a:rPr sz="1500" b="1" dirty="0">
                 <a:solidFill>
                   <a:srgbClr val="10B981"/>
                 </a:solidFill>
                 <a:latin typeface="Arial"/>
               </a:rPr>
-              <a:t>• Core Line Coverage: 95.3% </a:t>
-            </a:r>
-            <a:r>
-              <a:rPr sz="1400" b="0">
+              <a:t>• Core Line Coverage: </a:t>
+            </a:r>
+            <a:r>
+              <a:rPr sz="1400" b="0" dirty="0">
                 <a:solidFill>
                   <a:srgbClr val="0F172A"/>
                 </a:solidFill>
                 <a:latin typeface="Arial"/>
               </a:rPr>
-              <a:t>Over 95% of active bridge RTL statements executed. Uncovered lines are defensive traps.</a:t>
+              <a:t>Over </a:t>
+            </a:r>
+            <a:r>
+              <a:rPr lang="en-US" sz="1400" dirty="0">
+                <a:solidFill>
+                  <a:srgbClr val="0F172A"/>
+                </a:solidFill>
+                <a:latin typeface="Arial"/>
+              </a:rPr>
+              <a:t>80%</a:t>
+            </a:r>
+            <a:r>
+              <a:rPr sz="1400" b="0" dirty="0">
+                <a:solidFill>
+                  <a:srgbClr val="0F172A"/>
+                </a:solidFill>
+                <a:latin typeface="Arial"/>
+              </a:rPr>
+              <a:t> of active bridge RTL statements executed. Uncovered lines are defensive traps.</a:t>
             </a:r>
           </a:p>
           <a:p>
@@ -9014,7 +9032,7 @@
               </a:spcAft>
             </a:pPr>
             <a:r>
-              <a:rPr sz="1500" b="1">
+              <a:rPr sz="1500" b="1" dirty="0">
                 <a:solidFill>
                   <a:srgbClr val="10B981"/>
                 </a:solidFill>
@@ -9023,7 +9041,7 @@
               <a:t>• FSM State Coverage: 80% </a:t>
             </a:r>
             <a:r>
-              <a:rPr sz="1400" b="0">
+              <a:rPr sz="1400" b="0" dirty="0">
                 <a:solidFill>
                   <a:srgbClr val="0F172A"/>
                 </a:solidFill>
@@ -9039,7 +9057,7 @@
               </a:spcAft>
             </a:pPr>
             <a:r>
-              <a:rPr sz="1500" b="1">
+              <a:rPr sz="1500" b="1" dirty="0">
                 <a:solidFill>
                   <a:srgbClr val="10B981"/>
                 </a:solidFill>
@@ -9048,7 +9066,7 @@
               <a:t>• Zero Scoreboard Errors: </a:t>
             </a:r>
             <a:r>
-              <a:rPr sz="1400" b="0">
+              <a:rPr sz="1400" b="0" dirty="0">
                 <a:solidFill>
                   <a:srgbClr val="0F172A"/>
                 </a:solidFill>
@@ -9153,42 +9171,6 @@
       </p:sp>
       <p:sp>
         <p:nvSpPr>
-          <p:cNvPr id="13" name="TextBox 12"/>
-          <p:cNvSpPr txBox="1"/>
-          <p:nvPr/>
-        </p:nvSpPr>
-        <p:spPr>
-          <a:xfrm>
-            <a:off x="6446520" y="1645920"/>
-            <a:ext cx="4754880" cy="411480"/>
-          </a:xfrm>
-          <a:prstGeom prst="rect">
-            <a:avLst/>
-          </a:prstGeom>
-          <a:noFill/>
-        </p:spPr>
-        <p:txBody>
-          <a:bodyPr wrap="square" lIns="0" tIns="0" rIns="0" bIns="0">
-            <a:spAutoFit/>
-          </a:bodyPr>
-          <a:lstStyle/>
-          <a:p>
-            <a:pPr>
-              <a:defRPr sz="1700" b="1">
-                <a:solidFill>
-                  <a:srgbClr val="1E3A8A"/>
-                </a:solidFill>
-                <a:latin typeface="Arial"/>
-              </a:defRPr>
-            </a:pPr>
-            <a:r>
-              <a:t>Defense for Teacher's Questions</a:t>
-            </a:r>
-          </a:p>
-        </p:txBody>
-      </p:sp>
-      <p:sp>
-        <p:nvSpPr>
           <p:cNvPr id="14" name="TextBox 13"/>
           <p:cNvSpPr txBox="1"/>
           <p:nvPr/>
@@ -9215,7 +9197,7 @@
               </a:spcAft>
             </a:pPr>
             <a:r>
-              <a:rPr sz="1500" b="1">
+              <a:rPr sz="1500" b="1" dirty="0">
                 <a:solidFill>
                   <a:srgbClr val="D97706"/>
                 </a:solidFill>
@@ -9224,13 +9206,22 @@
               <a:t>• 1. Tied Pins Cannot Toggle: </a:t>
             </a:r>
             <a:r>
-              <a:rPr sz="1400" b="0">
+              <a:rPr sz="1400" b="0" dirty="0" err="1">
                 <a:solidFill>
                   <a:srgbClr val="0F172A"/>
                 </a:solidFill>
                 <a:latin typeface="Arial"/>
               </a:rPr>
-              <a:t>test_en_i DFT pin is tied to 0. PSEL is tied to 1'b1. They cannot toggle by design!</a:t>
+              <a:t>test_en_i</a:t>
+            </a:r>
+            <a:r>
+              <a:rPr sz="1400" b="0" dirty="0">
+                <a:solidFill>
+                  <a:srgbClr val="0F172A"/>
+                </a:solidFill>
+                <a:latin typeface="Arial"/>
+              </a:rPr>
+              <a:t> DFT pin is tied to 0. PSEL is tied to 1'b1. They cannot toggle by design!</a:t>
             </a:r>
           </a:p>
           <a:p>
@@ -9240,7 +9231,7 @@
               </a:spcAft>
             </a:pPr>
             <a:r>
-              <a:rPr sz="1500" b="1">
+              <a:rPr sz="1500" b="1" dirty="0">
                 <a:solidFill>
                   <a:srgbClr val="D97706"/>
                 </a:solidFill>
@@ -9249,7 +9240,7 @@
               <a:t>• 2. Unused AXI Fields: </a:t>
             </a:r>
             <a:r>
-              <a:rPr sz="1400" b="0">
+              <a:rPr sz="1400" b="0" dirty="0">
                 <a:solidFill>
                   <a:srgbClr val="0F172A"/>
                 </a:solidFill>
@@ -9265,7 +9256,7 @@
               </a:spcAft>
             </a:pPr>
             <a:r>
-              <a:rPr sz="1500" b="1">
+              <a:rPr sz="1500" b="1" dirty="0">
                 <a:solidFill>
                   <a:srgbClr val="D97706"/>
                 </a:solidFill>
@@ -9274,7 +9265,7 @@
               <a:t>• 3. FIFO Overflow Traps: </a:t>
             </a:r>
             <a:r>
-              <a:rPr sz="1400" b="0">
+              <a:rPr sz="1400" b="0" dirty="0">
                 <a:solidFill>
                   <a:srgbClr val="0F172A"/>
                 </a:solidFill>
@@ -9290,7 +9281,7 @@
               </a:spcAft>
             </a:pPr>
             <a:r>
-              <a:rPr sz="1500" b="1">
+              <a:rPr sz="1500" b="1" dirty="0">
                 <a:solidFill>
                   <a:srgbClr val="2563EB"/>
                 </a:solidFill>
@@ -9299,7 +9290,7 @@
               <a:t>• Sign-Off Conclusion: </a:t>
             </a:r>
             <a:r>
-              <a:rPr sz="1400" b="0">
+              <a:rPr sz="1400" b="0" dirty="0">
                 <a:solidFill>
                   <a:srgbClr val="0F172A"/>
                 </a:solidFill>
@@ -9944,7 +9935,7 @@
         <p:spPr>
           <a:xfrm>
             <a:off x="8348472" y="2423160"/>
-            <a:ext cx="2871216" cy="2468880"/>
+            <a:ext cx="2871216" cy="1815882"/>
           </a:xfrm>
           <a:prstGeom prst="rect">
             <a:avLst/>
@@ -9965,21 +9956,61 @@
               </a:defRPr>
             </a:pPr>
             <a:r>
+              <a:rPr dirty="0"/>
               <a:t>• 100% AXI Functional Coverage</a:t>
             </a:r>
-            <a:br/>
-            <a:br/>
-            <a:r>
-              <a:t>• 95.8% APB Functional Coverage</a:t>
-            </a:r>
-            <a:br/>
-            <a:br/>
-            <a:r>
-              <a:t>• 95.3% Core RTL Line Coverage</a:t>
-            </a:r>
-            <a:br/>
-            <a:br/>
-            <a:r>
+            <a:br>
+              <a:rPr dirty="0"/>
+            </a:br>
+            <a:br>
+              <a:rPr dirty="0"/>
+            </a:br>
+            <a:r>
+              <a:rPr dirty="0"/>
+              <a:t>• </a:t>
+            </a:r>
+            <a:r>
+              <a:rPr lang="en-US" dirty="0"/>
+              <a:t>9</a:t>
+            </a:r>
+            <a:r>
+              <a:rPr dirty="0"/>
+              <a:t>5</a:t>
+            </a:r>
+            <a:r>
+              <a:rPr lang="en-US" dirty="0"/>
+              <a:t>.8</a:t>
+            </a:r>
+            <a:r>
+              <a:rPr dirty="0"/>
+              <a:t>% APB Functional Coverage</a:t>
+            </a:r>
+            <a:br>
+              <a:rPr dirty="0"/>
+            </a:br>
+            <a:br>
+              <a:rPr dirty="0"/>
+            </a:br>
+            <a:r>
+              <a:rPr dirty="0"/>
+              <a:t>• </a:t>
+            </a:r>
+            <a:r>
+              <a:rPr lang="en-US" dirty="0"/>
+              <a:t>85</a:t>
+            </a:r>
+            <a:r>
+              <a:rPr dirty="0"/>
+              <a:t>% Core RTL Line Coverage</a:t>
+            </a:r>
+            <a:br>
+              <a:rPr dirty="0"/>
+            </a:br>
+            <a:br>
+              <a:rPr dirty="0"/>
+            </a:br>
+            <a:r>
+              <a:rPr dirty="0"/>
               <a:t>• Full engineering defense for hardwired signals</a:t>
             </a:r>
           </a:p>
@@ -15480,7 +15511,7 @@
               </a:spcAft>
             </a:pPr>
             <a:r>
-              <a:rPr sz="1500" b="1">
+              <a:rPr sz="1500" b="1" dirty="0">
                 <a:solidFill>
                   <a:srgbClr val="2563EB"/>
                 </a:solidFill>
@@ -15489,7 +15520,7 @@
               <a:t>• Test Objective: </a:t>
             </a:r>
             <a:r>
-              <a:rPr sz="1400" b="0">
+              <a:rPr sz="1400" b="0" dirty="0">
                 <a:solidFill>
                   <a:srgbClr val="0F172A"/>
                 </a:solidFill>
@@ -15505,7 +15536,7 @@
               </a:spcAft>
             </a:pPr>
             <a:r>
-              <a:rPr sz="1500" b="1">
+              <a:rPr sz="1500" b="1" dirty="0">
                 <a:solidFill>
                   <a:srgbClr val="2563EB"/>
                 </a:solidFill>
@@ -15514,7 +15545,7 @@
               <a:t>• Step 1 (AXI Address &amp; Data): </a:t>
             </a:r>
             <a:r>
-              <a:rPr sz="1400" b="0">
+              <a:rPr sz="1400" b="0" dirty="0">
                 <a:solidFill>
                   <a:srgbClr val="0F172A"/>
                 </a:solidFill>
@@ -15530,7 +15561,7 @@
               </a:spcAft>
             </a:pPr>
             <a:r>
-              <a:rPr sz="1500" b="1">
+              <a:rPr sz="1500" b="1" dirty="0">
                 <a:solidFill>
                   <a:srgbClr val="2563EB"/>
                 </a:solidFill>
@@ -15539,7 +15570,7 @@
               <a:t>• Step 2 (DUT FIFO Buffering): </a:t>
             </a:r>
             <a:r>
-              <a:rPr sz="1400" b="0">
+              <a:rPr sz="1400" b="0" dirty="0">
                 <a:solidFill>
                   <a:srgbClr val="0F172A"/>
                 </a:solidFill>
@@ -15555,7 +15586,7 @@
               </a:spcAft>
             </a:pPr>
             <a:r>
-              <a:rPr sz="1500" b="1">
+              <a:rPr sz="1500" b="1" dirty="0">
                 <a:solidFill>
                   <a:srgbClr val="2563EB"/>
                 </a:solidFill>
@@ -15564,7 +15595,7 @@
               <a:t>• Step 3 (APB Transfer): </a:t>
             </a:r>
             <a:r>
-              <a:rPr sz="1400" b="0">
+              <a:rPr sz="1400" b="0" dirty="0">
                 <a:solidFill>
                   <a:srgbClr val="0F172A"/>
                 </a:solidFill>
@@ -15580,7 +15611,7 @@
               </a:spcAft>
             </a:pPr>
             <a:r>
-              <a:rPr sz="1500" b="1">
+              <a:rPr sz="1500" b="1" dirty="0">
                 <a:solidFill>
                   <a:srgbClr val="2563EB"/>
                 </a:solidFill>
@@ -15589,7 +15620,7 @@
               <a:t>• Step 4 (Completion &amp; Checking): </a:t>
             </a:r>
             <a:r>
-              <a:rPr sz="1400" b="0">
+              <a:rPr sz="1400" b="0" dirty="0">
                 <a:solidFill>
                   <a:srgbClr val="0F172A"/>
                 </a:solidFill>
